--- a/dist/weeks-2학기/서비스디자인_2학기_09주차_패널레이아웃.pptx
+++ b/dist/weeks-2학기/서비스디자인_2학기_09주차_패널레이아웃.pptx
@@ -721,11 +721,11 @@
 먼저 폭이요. 블록 하나가 열 몇 개를 쓰는지 먼저 정하세요.
 여섯 열이면 2열, 3열, 6열 중에서 고르시면 됩니다. 2열이면 세 개가 나란히 들어가고, 3열이면 둘, 6열이면 하나죠.
 2.5열 같은 건 없습니다. 열을 반으로 쪼개 쓰시면 안 돼요.
-둘째, 높이. 본문 줄 간격의 배수로 끊으세요. 줄 간격이 30이면 블록 높이는 300, 330, 360 이런 식으로요.
+높이는 본문 줄 간격의 배수로 끊으세요. 줄 간격이 30이면 블록 높이는 300, 330, 360 이런 식으로요.
 내용 있는 만큼만 늘리시면 블록마다 높이가 제각각이 됩니다.
-셋째, 블록 사이 간격. 단 간격의 두 배로 띄우세요.
+블록 사이 간격은 단 간격의 두 배로 띄우세요.
 이게 왜 중요하냐면, 블록 안쪽 여백보다 블록 사이가 넓어야 한 덩어리로 보입니다. 반대면 흩어져 보여요.
-넷째, 글은 왼쪽 끝을 맞추세요. 가운데 정렬하면 줄마다 끝이 달라져서 지저분해 보입니다.
+마지막으로 글은 왼쪽 끝을 맞추세요. 가운데 정렬하면 줄마다 끝이 달라져서 지저분해 보입니다.
 가운데 정렬은 작품명 한 군데만 쓰셔도 충분합니다.
 [운영 메모]
 셋째를 그림으로 보여 주면 빠르다. 블록 사이가 좁은 예와 넓은 예를 즉석에서 만들어 보일 것.</a:t>
@@ -915,7 +915,7 @@
               <a:rPr lang="en-US" dirty="0"/>
               <a:t>[말할 내용]
 네 번째입니다. 오늘 새로 들어가는 부분이에요.
-패널에서 관람자가 제일 오래 보는 자리가 어디일 것 같으세요.
+패널에서 관람자가 제일 오래 보는 곳이 어디일 것 같으세요.
 작품명 바로 아래입니다. 제목을 보고 '이게 뭐지' 하면서 바로 아래를 봐요.
 그 자리에 여러분 서비스의 핵심 설명이 들어가야 합니다.
 그런데 여기를 글로만 채우시면 아무도 안 읽습니다. 화면만 깔면 뭔지 모르고요.
@@ -1115,10 +1115,10 @@
 첫째, 어떤 문제. 누가, 어떤 상황에서, 무엇에 막히는지입니다.
 '사용자 경험을 개선하기 위해' 이런 거 말고요. '처음 입사한 사람이 회식 자리에서 어떻게 앉아야 할지 모른다.' 이렇게 쓰세요.
 두 줄 안쪽입니다.
-둘째, 어떻게 풀었나. 이 서비스가 그 문제를 어떤 방법으로 더는지. 한 문장이에요.
-셋째, 핵심 화면. 그 방법이 가장 잘 보이는 화면 한 장입니다.
+그다음은 어떻게 풀었나입니다. 이 서비스가 그 문제를 어떤 방법으로 더는지, 한 문장으로 씁니다.
+세 번째는 핵심 화면입니다. 그 방법이 가장 잘 보이는 화면 한 장이요.
 이게 고르기 어려우실 거예요. 기준은 하나입니다. 이 화면 하나만 보여 줬을 때 '아 이렇게 하는 거구나' 하면 그게 핵심 화면입니다.
-넷째, 작동 순서. 쓰는 사람이 거치는 넉 장이요. 시작하고, 고르고, 확인하고, 결과를 봅니다.
+마지막은 작동 순서입니다. 쓰는 사람이 거치는 넉 장이요. 시작하고, 고르고, 확인하고, 결과를 봅니다.
 넉 장이 넘어가면 줄이세요. 여섯 장 깔면 관람자가 안 따라옵니다.
 네 칸을 다 못 채우시겠다면, 패널 문제가 아니라 서비스가 덜 정해진 겁니다. 그때는 패널 말고 서비스부터 다시 보셔야 해요.
 [운영 메모]
@@ -1215,9 +1215,9 @@
 패널에 그리기 전에 글로 먼저 정하는 거예요.
 왼쪽이 적을 것입니다.
 먼저 네 칸의 내용. 문제, 해결, 핵심 화면, 작동 순서.
-둘째, 핵심 화면을 왜 그걸로 골랐는지. 한 줄이면 됩니다. 이걸 못 쓰시면 아직 안 고르신 거예요.
-셋째, 작동 순서 넉 장의 번호. 화면 목록표에 번호 매기셨죠. 그 번호로 적으세요.
-넷째, 설명 영역이 패널에서 차지할 자리. 몇 열을 쓰고 위에서 몇 번째 칸인지.
+그다음은 핵심 화면을 왜 그것으로 골랐는지입니다. 한 줄이면 됩니다. 이걸 못 쓰시면 아직 안 고르신 거예요.
+세 번째는 작동 순서 넉 장의 번호입니다. 화면 목록표에 번호 매기셨지요. 그 번호로 적으세요.
+마지막은 설명 영역이 패널에서 차지할 위치입니다. 몇 열을 쓰고 위에서 몇 번째 칸인지요.
 오른쪽이 형식입니다.
 A4 한 장이에요. 글로만 적으세요. 이미지는 넣지 마시고 화면은 번호만.
 이미지를 넣기 시작하면 또 디자인을 하게 됩니다. 오늘은 무엇을 말할지만 정하는 거예요.
@@ -1408,9 +1408,9 @@
 세 가지로 순서를 만듭니다.
 먼저 크기요. 제일 큰 것이 먼저 읽힙니다. 이건 그냥 그렇게 됩니다.
 그러니까 한 장에 주인공은 하나여야 해요. 둘이면 눈이 왔다 갔다 합니다.
-둘째, 위치. 사람은 왼쪽 위에서 오른쪽 아래로 읽습니다. 중요한 걸 위에 두세요.
+그다음은 위치입니다. 사람은 왼쪽 위에서 오른쪽 아래로 읽습니다. 중요한 걸 위에 두세요.
 아래쪽은 허리를 굽혀야 보입니다. 거기에 중요한 걸 두면 아무도 안 봐요.
-셋째, 번호. 섹션에 번호를 답니다.
+마지막은 번호입니다. 섹션에 번호를 답니다.
 크기와 위치로 순서가 안 만들어질 때 번호가 대신합니다. 흐름도처럼 여러 개가 나란히 있을 때 특히 그래요.
 한 가지 주의하실 게 있습니다. 셋이 서로 어긋나면 안 돼요.
 번호는 1, 2, 3인데 크기는 2번이 제일 크고 위치는 3번이 맨 위에 있으면, 관람자는 아무 순서도 못 읽습니다.
@@ -1706,7 +1706,7 @@
 한 줄 정의. 무엇을 만들었는지 한 문장이요.
 주인공 화면 한 장. 제일 자신 있는 화면을 크게 거세요.
 흐름 하나. 시작에서 결과까지 이어지는 것. 다섯 장쯤 됩니다.
-규격과 토큰. 한 장으로 요약하세요. 이게 업계에서 오신 분들이 보는 자리입니다.
+규격과 토큰. 한 장으로 요약하세요. 업계에서 오신 분들이 여기를 보십니다.
 화면 목록. 전체가 몇 장인지 보이게요. 다 거는 게 아니라 규모만 보이면 됩니다.
 오른쪽이 빼는 것입니다.
 화면 전부. 열다섯 장을 다 깔지 마세요. 다 보여 주면 한 장도 못 보여 준 겁니다.
@@ -1906,7 +1906,7 @@
               <a:t>[말할 내용]
 오늘 확인하고 가실 것들입니다.
 앞의 넷은 그리드예요. 재단 여백, 마진, 열과 단 간격.
-다섯째, 한 줄 정의 자리를 잡으셨는지. 문장은 과제로 쓰시고 오늘은 자리만 잡으시면 됩니다.
+다섯 번째 줄은 한 줄 정의가 들어갈 위치를 잡으셨는지입니다. 문장은 과제로 쓰시고 오늘은 자리만 잡으시면 됩니다.
 여섯째, 주인공 화면이 하나인지. 둘이면 줄이세요.
 일곱째, 캡션 자리요. 화면 옆에 한 줄 들어갈 자리를 비워 두셨는지.
 마지막, 석 장이 같은 그리드를 쓰는지. 이게 제일 많이 깨집니다.
@@ -2007,9 +2007,9 @@
 핵심 화면을 왜 그걸로 골랐는지 한 줄 덧붙이세요. 이걸 못 쓰시면 아직 안 고르신 겁니다.
 작동 순서 넉 장은 화면 목록표 번호로 적으세요.
 이미지는 넣지 마세요. 넣기 시작하면 또 디자인을 하게 됩니다. 오늘 과제는 무엇을 말할지 정하는 거예요.
-둘째, 패널 레이아웃 시안 한 장. 오늘 고른 안을 A0 비율로 옮기세요.
+두 번째는 패널 레이아웃 시안 한 장입니다. 오늘 고른 안을 A0 비율로 옮기세요.
 그리드와 블록 자리까지만 그리시면 됩니다. 내용은 네모로 두시고요. 다만 설명 영역 네 칸이 어디인지는 표시해 주세요.
-셋째, 실을 것 목록과 한 줄 정의. 화면 목록표에 패널 게재 칸이 있지요. 거기 채우시고, 작품명 아래 들어갈 한 문장을 쓰세요.
+세 번째는 실을 것 목록과 한 줄 정의입니다. 화면 목록표에 패널 게재 칸이 있지요. 거기 채우시고, 작품명 아래 들어갈 한 문장을 쓰세요.
 한 줄 정의가 제일 어려우실 겁니다. 수식을 빼세요. '사용자 중심의 혁신적인' 이런 말 말고 누구를 위한 무슨 앱인지만요.
 세 가지 다 다음 주 수업 시작 전까지입니다.
 [운영 메모]
@@ -2197,9 +2197,9 @@
 세 사람입니다.
 먼저 심사하는 분. 교수님들이죠. 이분들은 과정을 봅니다. 결과만 예쁘면 '어떻게 나왔냐'고 물으세요.
 그러니까 리서치에서 화면까지 어떻게 왔는지가 보여야 합니다.
-둘째, 업계에서 오신 분. 전시회에 꼭 오십니다. 이분들은 '이 학생을 쓸 수 있나'를 봅니다.
+그다음은 업계에서 오신 분입니다. 전시회에 꼭 오십니다. 이분들은 '이 학생을 쓸 수 있나'를 봅니다.
 규격을 정할 줄 아는지, 컴포넌트를 만들 줄 아는지. 여러분이 3주차부터 쌓은 게 여기서 값을 합니다.
-셋째가 제일 많은데 제일 많이 빠뜨립니다. 가족, 친구, 그냥 지나가는 관람객이요.
+마지막이 가장 많은데 가장 많이 빠뜨립니다. 가족, 친구, 그냥 지나가는 관람객입니다.
 이분들은 UX가 뭔지 모르십니다. '무엇을 만들었는가' 하나만 보세요.
 그래서 한 줄 정의가 필요한 겁니다. 작품명만 크게 써 놓으면 이분들은 아무것도 모르고 지나갑니다.
 셋 다 3초 안에 알아야 합니다.
@@ -2590,7 +2590,7 @@
 먼저 그리드를 그립니다. 재단 여백, 마진, 열, 기준선. 내용은 아직 없어요.
 다음 큰 덩어리를 앉힙니다. 작품명 자리, 주인공 화면 자리, 섹션 네 개 자리. 네모로만 둡니다. 글은 아직 안 넣어요.
 여기서 멈추고 한 번 보세요. 네모만 봐도 어디가 주인공인지 보여야 합니다. 안 보이면 지금 고치세요. 글을 넣고 나면 고치기 어렵습니다.
-셋째, 글을 넣습니다. 한 줄 정의, 섹션 제목, 본문. 열 폭에 맞춰 흘리세요.
+그다음에 글을 넣습니다. 한 줄 정의, 섹션 제목, 본문을 열 폭에 맞춰 흘리세요.
 마지막이 캡션입니다. 화면 옆에 지시선을 긋고 한 줄씩.
 캡션을 마지막에 하는 이유가 있어요. 화면 자리가 정해져야 지시선을 어디로 그을지 알 수 있거든요.
 [운영 메모]
@@ -7288,7 +7288,7 @@
                 <a:ea typeface="Pretendard Light" pitchFamily="34" charset="-122"/>
                 <a:cs typeface="Pretendard Light" pitchFamily="34" charset="-120"/>
               </a:rPr>
-              <a:t>관람자가 제일 오래 보는 자리입니다. 네 칸으로 나눕니다.</a:t>
+              <a:t>관람자가 제일 오래 보는 곳입니다. 네 칸으로 나눕니다.</a:t>
             </a:r>
             <a:endParaRPr lang="en-US" sz="1350" dirty="0"/>
           </a:p>
@@ -10220,7 +10220,7 @@
                 <a:ea typeface="Pretendard SemiBold" pitchFamily="34" charset="-122"/>
                 <a:cs typeface="Pretendard SemiBold" pitchFamily="34" charset="-120"/>
               </a:rPr>
-              <a:t>순서를 만드는 세 가지</a:t>
+              <a:t>읽는 순서를 만드는 방법</a:t>
             </a:r>
             <a:endParaRPr lang="en-US" sz="3000" dirty="0"/>
           </a:p>

--- a/dist/weeks-2학기/서비스디자인_2학기_09주차_패널레이아웃.pptx
+++ b/dist/weeks-2학기/서비스디자인_2학기_09주차_패널레이아웃.pptx
@@ -4189,24 +4189,27 @@
         </p:nvSpPr>
         <p:spPr>
           <a:xfrm>
-            <a:off x="640080" y="2889504"/>
-            <a:ext cx="7863840" cy="786384"/>
-          </a:xfrm>
-          <a:prstGeom prst="rect">
-            <a:avLst/>
-          </a:prstGeom>
-          <a:noFill/>
-          <a:ln/>
-        </p:spPr>
-        <p:txBody>
-          <a:bodyPr wrap="square" lIns="0" tIns="0" rIns="0" bIns="0" rtlCol="0" anchor="ctr"/>
-          <a:lstStyle/>
-          <a:p>
-            <a:pPr indent="0" marL="0">
-              <a:buNone/>
-            </a:pPr>
-            <a:r>
-              <a:rPr lang="en-US" sz="4600" dirty="0">
+            <a:off x="640080" y="2761488"/>
+            <a:ext cx="7863840" cy="1042416"/>
+          </a:xfrm>
+          <a:prstGeom prst="rect">
+            <a:avLst/>
+          </a:prstGeom>
+          <a:noFill/>
+          <a:ln/>
+        </p:spPr>
+        <p:txBody>
+          <a:bodyPr wrap="square" lIns="0" tIns="0" rIns="0" bIns="0" rtlCol="0" anchor="ctr"/>
+          <a:lstStyle/>
+          <a:p>
+            <a:pPr indent="0" marL="0">
+              <a:lnSpc>
+                <a:spcPct val="114000"/>
+              </a:lnSpc>
+              <a:buNone/>
+            </a:pPr>
+            <a:r>
+              <a:rPr lang="en-US" sz="3400" dirty="0">
                 <a:solidFill>
                   <a:srgbClr val="FFFFFF"/>
                 </a:solidFill>
@@ -4214,9 +4217,9 @@
                 <a:ea typeface="Pretendard SemiBold" pitchFamily="34" charset="-122"/>
                 <a:cs typeface="Pretendard SemiBold" pitchFamily="34" charset="-120"/>
               </a:rPr>
-              <a:t>블록 배치</a:t>
-            </a:r>
-            <a:endParaRPr lang="en-US" sz="4600" dirty="0"/>
+              <a:t>내용 블록을 배치하는 방법</a:t>
+            </a:r>
+            <a:endParaRPr lang="en-US" sz="3400" dirty="0"/>
           </a:p>
         </p:txBody>
       </p:sp>
@@ -4281,7 +4284,7 @@
                 <a:ea typeface="Pretendard Light" pitchFamily="34" charset="-122"/>
                 <a:cs typeface="Pretendard Light" pitchFamily="34" charset="-120"/>
               </a:rPr>
-              <a:t>그리드를 세웠으면 그 위에 덩어리를 앉힙니다. 열 단위로 잡습니다.</a:t>
+              <a:t>그리드를 세운 다음, 그 위에 내용 블록을 배치합니다. 열을 기준으로 잡습니다.</a:t>
             </a:r>
             <a:endParaRPr lang="en-US" sz="1350" dirty="0"/>
           </a:p>
@@ -4572,7 +4575,7 @@
                 <a:ea typeface="Pretendard SemiBold" pitchFamily="34" charset="-122"/>
                 <a:cs typeface="Pretendard SemiBold" pitchFamily="34" charset="-120"/>
               </a:rPr>
-              <a:t>블록은 열 단위로 잡는다</a:t>
+              <a:t>블록은 그리드 기준으로 배치한다</a:t>
             </a:r>
             <a:endParaRPr lang="en-US" sz="3000" dirty="0"/>
           </a:p>
@@ -4611,7 +4614,7 @@
                 <a:ea typeface="Pretendard" pitchFamily="34" charset="-122"/>
                 <a:cs typeface="Pretendard" pitchFamily="34" charset="-120"/>
               </a:rPr>
-              <a:t>블록 하나가 열 몇 개를 쓰는지부터 정합니다.</a:t>
+              <a:t>블록 하나가 열을 몇 개 쓰는지부터 정하는 것이 좋습니다.</a:t>
             </a:r>
             <a:endParaRPr lang="en-US" sz="1150" dirty="0"/>
           </a:p>
@@ -5346,7 +5349,7 @@
                 <a:ea typeface="Pretendard" pitchFamily="34" charset="-122"/>
                 <a:cs typeface="Pretendard" pitchFamily="34" charset="-120"/>
               </a:rPr>
-              <a:t>열을 반으로 쪼개 쓰면 그리드를 세운 뜻이 없어집니다.</a:t>
+              <a:t>열을 반으로 나누어 쓰면 그리드를 세운 효과가 줄어듭니다.</a:t>
             </a:r>
             <a:endParaRPr lang="en-US" sz="1250" dirty="0"/>
           </a:p>
@@ -5701,7 +5704,7 @@
                 <a:ea typeface="Pretendard SemiBold" pitchFamily="34" charset="-122"/>
                 <a:cs typeface="Pretendard SemiBold" pitchFamily="34" charset="-120"/>
               </a:rPr>
-              <a:t>블록을 앉힐 때</a:t>
+              <a:t>블록 배치 시 확인할 사항</a:t>
             </a:r>
             <a:endParaRPr lang="en-US" sz="3000" dirty="0"/>
           </a:p>
@@ -5740,7 +5743,7 @@
                 <a:ea typeface="Pretendard" pitchFamily="34" charset="-122"/>
                 <a:cs typeface="Pretendard" pitchFamily="34" charset="-120"/>
               </a:rPr>
-              <a:t>2밀리 차이가 멀리서 보입니다.</a:t>
+              <a:t>2mm 차이도 멀리서는 드러납니다.</a:t>
             </a:r>
             <a:endParaRPr lang="en-US" sz="1150" dirty="0"/>
           </a:p>
@@ -6758,7 +6761,7 @@
                 <a:ea typeface="Pretendard" pitchFamily="34" charset="-122"/>
                 <a:cs typeface="Pretendard" pitchFamily="34" charset="-120"/>
               </a:rPr>
-              <a:t>안쪽 여백보다 블록 사이가 넓어야 한 덩어리로 묶여 보입니다.</a:t>
+              <a:t>안쪽 여백보다 블록 사이를 넓게 두면 한 덩어리로 묶여 보입니다.</a:t>
             </a:r>
             <a:endParaRPr lang="en-US" sz="1300" dirty="0"/>
           </a:p>
@@ -7196,24 +7199,27 @@
         </p:nvSpPr>
         <p:spPr>
           <a:xfrm>
-            <a:off x="640080" y="2889504"/>
-            <a:ext cx="7863840" cy="786384"/>
-          </a:xfrm>
-          <a:prstGeom prst="rect">
-            <a:avLst/>
-          </a:prstGeom>
-          <a:noFill/>
-          <a:ln/>
-        </p:spPr>
-        <p:txBody>
-          <a:bodyPr wrap="square" lIns="0" tIns="0" rIns="0" bIns="0" rtlCol="0" anchor="ctr"/>
-          <a:lstStyle/>
-          <a:p>
-            <a:pPr indent="0" marL="0">
-              <a:buNone/>
-            </a:pPr>
-            <a:r>
-              <a:rPr lang="en-US" sz="4600" dirty="0">
+            <a:off x="640080" y="2761488"/>
+            <a:ext cx="7863840" cy="1042416"/>
+          </a:xfrm>
+          <a:prstGeom prst="rect">
+            <a:avLst/>
+          </a:prstGeom>
+          <a:noFill/>
+          <a:ln/>
+        </p:spPr>
+        <p:txBody>
+          <a:bodyPr wrap="square" lIns="0" tIns="0" rIns="0" bIns="0" rtlCol="0" anchor="ctr"/>
+          <a:lstStyle/>
+          <a:p>
+            <a:pPr indent="0" marL="0">
+              <a:lnSpc>
+                <a:spcPct val="114000"/>
+              </a:lnSpc>
+              <a:buNone/>
+            </a:pPr>
+            <a:r>
+              <a:rPr lang="en-US" sz="3400" dirty="0">
                 <a:solidFill>
                   <a:srgbClr val="FFFFFF"/>
                 </a:solidFill>
@@ -7221,9 +7227,9 @@
                 <a:ea typeface="Pretendard SemiBold" pitchFamily="34" charset="-122"/>
                 <a:cs typeface="Pretendard SemiBold" pitchFamily="34" charset="-120"/>
               </a:rPr>
-              <a:t>핵심 서비스 설명 배치</a:t>
-            </a:r>
-            <a:endParaRPr lang="en-US" sz="4600" dirty="0"/>
+              <a:t>핵심 서비스 내용을 배치하는 방법</a:t>
+            </a:r>
+            <a:endParaRPr lang="en-US" sz="3400" dirty="0"/>
           </a:p>
         </p:txBody>
       </p:sp>
@@ -7288,7 +7294,7 @@
                 <a:ea typeface="Pretendard Light" pitchFamily="34" charset="-122"/>
                 <a:cs typeface="Pretendard Light" pitchFamily="34" charset="-120"/>
               </a:rPr>
-              <a:t>관람자가 제일 오래 보는 곳입니다. 네 칸으로 나눕니다.</a:t>
+              <a:t>관람자가 가장 오래 보는 영역입니다. 네 가지 요소로 나누어 구성합니다.</a:t>
             </a:r>
             <a:endParaRPr lang="en-US" sz="1350" dirty="0"/>
           </a:p>
@@ -7579,7 +7585,7 @@
                 <a:ea typeface="Pretendard SemiBold" pitchFamily="34" charset="-122"/>
                 <a:cs typeface="Pretendard SemiBold" pitchFamily="34" charset="-120"/>
               </a:rPr>
-              <a:t>설명 영역을 네 칸으로</a:t>
+              <a:t>설명 영역을 구조화하는 방법</a:t>
             </a:r>
             <a:endParaRPr lang="en-US" sz="3000" dirty="0"/>
           </a:p>
@@ -7706,7 +7712,7 @@
                 <a:ea typeface="Pretendard" pitchFamily="34" charset="-122"/>
                 <a:cs typeface="Pretendard" pitchFamily="34" charset="-120"/>
               </a:rPr>
-              <a:t>네 칸을 못 채우면 패널이 아니라 서비스가 덜 정해진 것입니다.</a:t>
+              <a:t>네 가지 요소를 정리하기 어렵다면 서비스 개념을 한 번 더 점검할 필요가 있습니다.</a:t>
             </a:r>
             <a:endParaRPr lang="en-US" sz="1150" dirty="0"/>
           </a:p>
@@ -8061,7 +8067,7 @@
                 <a:ea typeface="Pretendard SemiBold" pitchFamily="34" charset="-122"/>
                 <a:cs typeface="Pretendard SemiBold" pitchFamily="34" charset="-120"/>
               </a:rPr>
-              <a:t>네 칸에 무엇을 적나</a:t>
+              <a:t>설명 영역에 포함할 핵심 내용</a:t>
             </a:r>
             <a:endParaRPr lang="en-US" sz="3000" dirty="0"/>
           </a:p>
@@ -8100,7 +8106,7 @@
                 <a:ea typeface="Pretendard" pitchFamily="34" charset="-122"/>
                 <a:cs typeface="Pretendard" pitchFamily="34" charset="-120"/>
               </a:rPr>
-              <a:t>①②는 글로 짧게, ③④는 그림으로 보입니다.</a:t>
+              <a:t>①②는 글로 짧게, ③④는 그림으로 제시합니다.</a:t>
             </a:r>
             <a:endParaRPr lang="en-US" sz="1150" dirty="0"/>
           </a:p>
@@ -8591,7 +8597,7 @@
                 <a:ea typeface="Pretendard" pitchFamily="34" charset="-122"/>
                 <a:cs typeface="Pretendard" pitchFamily="34" charset="-120"/>
               </a:rPr>
-              <a:t>네 칸을 못 채우면 패널이 아니라 서비스가 덜 정해진 것입니다.</a:t>
+              <a:t>네 가지 요소를 정리하기 어렵다면 서비스 개념을 한 번 더 점검할 필요가 있습니다.</a:t>
             </a:r>
             <a:endParaRPr lang="en-US" sz="1300" dirty="0"/>
           </a:p>
@@ -8946,7 +8952,7 @@
                 <a:ea typeface="Pretendard SemiBold" pitchFamily="34" charset="-122"/>
                 <a:cs typeface="Pretendard SemiBold" pitchFamily="34" charset="-120"/>
               </a:rPr>
-              <a:t>과제 — 설명 배치 기획안</a:t>
+              <a:t>과제: 설명 배치 계획 수립</a:t>
             </a:r>
             <a:endParaRPr lang="en-US" sz="3000" dirty="0"/>
           </a:p>
@@ -9837,24 +9843,27 @@
         </p:nvSpPr>
         <p:spPr>
           <a:xfrm>
-            <a:off x="640080" y="2889504"/>
-            <a:ext cx="7863840" cy="786384"/>
-          </a:xfrm>
-          <a:prstGeom prst="rect">
-            <a:avLst/>
-          </a:prstGeom>
-          <a:noFill/>
-          <a:ln/>
-        </p:spPr>
-        <p:txBody>
-          <a:bodyPr wrap="square" lIns="0" tIns="0" rIns="0" bIns="0" rtlCol="0" anchor="ctr"/>
-          <a:lstStyle/>
-          <a:p>
-            <a:pPr indent="0" marL="0">
-              <a:buNone/>
-            </a:pPr>
-            <a:r>
-              <a:rPr lang="en-US" sz="4600" dirty="0">
+            <a:off x="640080" y="2761488"/>
+            <a:ext cx="7863840" cy="1042416"/>
+          </a:xfrm>
+          <a:prstGeom prst="rect">
+            <a:avLst/>
+          </a:prstGeom>
+          <a:noFill/>
+          <a:ln/>
+        </p:spPr>
+        <p:txBody>
+          <a:bodyPr wrap="square" lIns="0" tIns="0" rIns="0" bIns="0" rtlCol="0" anchor="ctr"/>
+          <a:lstStyle/>
+          <a:p>
+            <a:pPr indent="0" marL="0">
+              <a:lnSpc>
+                <a:spcPct val="114000"/>
+              </a:lnSpc>
+              <a:buNone/>
+            </a:pPr>
+            <a:r>
+              <a:rPr lang="en-US" sz="3400" dirty="0">
                 <a:solidFill>
                   <a:srgbClr val="FFFFFF"/>
                 </a:solidFill>
@@ -9862,9 +9871,9 @@
                 <a:ea typeface="Pretendard SemiBold" pitchFamily="34" charset="-122"/>
                 <a:cs typeface="Pretendard SemiBold" pitchFamily="34" charset="-120"/>
               </a:rPr>
-              <a:t>읽는 순서와 고르기</a:t>
-            </a:r>
-            <a:endParaRPr lang="en-US" sz="4600" dirty="0"/>
+              <a:t>관람자의 시선 흐름 설계</a:t>
+            </a:r>
+            <a:endParaRPr lang="en-US" sz="3400" dirty="0"/>
           </a:p>
         </p:txBody>
       </p:sp>
@@ -9929,7 +9938,7 @@
                 <a:ea typeface="Pretendard Light" pitchFamily="34" charset="-122"/>
                 <a:cs typeface="Pretendard Light" pitchFamily="34" charset="-120"/>
               </a:rPr>
-              <a:t>어디부터 볼지 관람자가 정하지 않습니다. 우리가 정합니다.</a:t>
+              <a:t>관람자의 시선 흐름은 설계하는 쪽에서 만들어 줍니다.</a:t>
             </a:r>
             <a:endParaRPr lang="en-US" sz="1350" dirty="0"/>
           </a:p>
@@ -10220,7 +10229,7 @@
                 <a:ea typeface="Pretendard SemiBold" pitchFamily="34" charset="-122"/>
                 <a:cs typeface="Pretendard SemiBold" pitchFamily="34" charset="-120"/>
               </a:rPr>
-              <a:t>읽는 순서를 만드는 방법</a:t>
+              <a:t>정보를 읽는 흐름을 유도하는 방법</a:t>
             </a:r>
             <a:endParaRPr lang="en-US" sz="3000" dirty="0"/>
           </a:p>
@@ -10259,7 +10268,7 @@
                 <a:ea typeface="Pretendard" pitchFamily="34" charset="-122"/>
                 <a:cs typeface="Pretendard" pitchFamily="34" charset="-120"/>
               </a:rPr>
-              <a:t>셋이 서로 어긋나면 아무 순서도 생기지 않습니다.</a:t>
+              <a:t>세 가지가 서로 어긋나면 시선 흐름이 만들어지지 않습니다.</a:t>
             </a:r>
             <a:endParaRPr lang="en-US" sz="1150" dirty="0"/>
           </a:p>
@@ -11115,7 +11124,7 @@
                 <a:ea typeface="Pretendard SemiBold" pitchFamily="34" charset="-122"/>
                 <a:cs typeface="Pretendard SemiBold" pitchFamily="34" charset="-120"/>
               </a:rPr>
-              <a:t>캡션은 화면 밖에</a:t>
+              <a:t>캡션은 화면 외부에서 설명한다</a:t>
             </a:r>
             <a:endParaRPr lang="en-US" sz="3000" dirty="0"/>
           </a:p>
@@ -11154,7 +11163,7 @@
                 <a:ea typeface="Pretendard" pitchFamily="34" charset="-122"/>
                 <a:cs typeface="Pretendard" pitchFamily="34" charset="-120"/>
               </a:rPr>
-              <a:t>목업 안 글씨는 아무리 키워도 안 읽힙니다.</a:t>
+              <a:t>목업 내부의 글자는 크기를 키워도 읽히지 않습니다.</a:t>
             </a:r>
             <a:endParaRPr lang="en-US" sz="1150" dirty="0"/>
           </a:p>
@@ -12172,7 +12181,7 @@
                 <a:ea typeface="Pretendard" pitchFamily="34" charset="-122"/>
                 <a:cs typeface="Pretendard" pitchFamily="34" charset="-120"/>
               </a:rPr>
-              <a:t>캡션은 한 줄입니다. 두 줄이 넘어가면 아무도 읽지 않습니다.</a:t>
+              <a:t>캡션은 한 줄로 작성합니다. 두 줄을 넘기면 읽히지 않습니다.</a:t>
             </a:r>
             <a:endParaRPr lang="en-US" sz="1300" dirty="0"/>
           </a:p>
@@ -12555,27 +12564,7 @@
                 <a:ea typeface="Pretendard SemiBold" pitchFamily="34" charset="-122"/>
                 <a:cs typeface="Pretendard SemiBold" pitchFamily="34" charset="-120"/>
               </a:rPr>
-              <a:t>2m 앞에서 3초.</a:t>
-            </a:r>
-            <a:endParaRPr lang="en-US" sz="3400" dirty="0"/>
-          </a:p>
-          <a:p>
-            <a:pPr indent="0" marL="0">
-              <a:lnSpc>
-                <a:spcPct val="122000"/>
-              </a:lnSpc>
-              <a:buNone/>
-            </a:pPr>
-            <a:r>
-              <a:rPr lang="en-US" sz="3400" dirty="0">
-                <a:solidFill>
-                  <a:srgbClr val="FFFFFF"/>
-                </a:solidFill>
-                <a:latin typeface="Pretendard SemiBold" pitchFamily="34" charset="0"/>
-                <a:ea typeface="Pretendard SemiBold" pitchFamily="34" charset="-122"/>
-                <a:cs typeface="Pretendard SemiBold" pitchFamily="34" charset="-120"/>
-              </a:rPr>
-              <a:t>그 안에 멈추게 해야 합니다.</a:t>
+              <a:t>관람객의 시선을 멈추게 하는 첫 3초</a:t>
             </a:r>
             <a:endParaRPr lang="en-US" sz="3400" dirty="0"/>
           </a:p>
@@ -12908,7 +12897,7 @@
                 <a:ea typeface="Pretendard SemiBold" pitchFamily="34" charset="-122"/>
                 <a:cs typeface="Pretendard SemiBold" pitchFamily="34" charset="-120"/>
               </a:rPr>
-              <a:t>싣는 것과 빼는 것</a:t>
+              <a:t>포함할 내용과 제외할 내용</a:t>
             </a:r>
             <a:endParaRPr lang="en-US" sz="3000" dirty="0"/>
           </a:p>
@@ -12947,7 +12936,7 @@
                 <a:ea typeface="Pretendard" pitchFamily="34" charset="-122"/>
                 <a:cs typeface="Pretendard" pitchFamily="34" charset="-120"/>
               </a:rPr>
-              <a:t>지금까지 만든 화면 목록표를 열고 고릅니다.</a:t>
+              <a:t>지금까지 만든 화면 목록표에서 선별합니다.</a:t>
             </a:r>
             <a:endParaRPr lang="en-US" sz="1150" dirty="0"/>
           </a:p>
@@ -13313,7 +13302,7 @@
                 <a:ea typeface="Pretendard" pitchFamily="34" charset="-122"/>
                 <a:cs typeface="Pretendard" pitchFamily="34" charset="-120"/>
               </a:rPr>
-              <a:t>화면 전부 — 다 깔면 한 장도 안 보입니다</a:t>
+              <a:t>화면 전부 — 모든 결과물을 나열하기보다 핵심을 선별합니다</a:t>
             </a:r>
             <a:endParaRPr lang="en-US" sz="1200" dirty="0"/>
           </a:p>
@@ -13740,7 +13729,7 @@
                 <a:ea typeface="Pretendard SemiBold" pitchFamily="34" charset="-122"/>
                 <a:cs typeface="Pretendard SemiBold" pitchFamily="34" charset="-120"/>
               </a:rPr>
-              <a:t>실습 · 썸네일 세 안</a:t>
+              <a:t>실습: 레이아웃 썸네일 제작</a:t>
             </a:r>
             <a:endParaRPr lang="en-US" sz="3000" dirty="0"/>
           </a:p>
@@ -13779,7 +13768,7 @@
                 <a:ea typeface="Pretendard" pitchFamily="34" charset="-122"/>
                 <a:cs typeface="Pretendard" pitchFamily="34" charset="-120"/>
               </a:rPr>
-              <a:t>35분. 손으로 그립니다. 노트북은 닫습니다.</a:t>
+              <a:t>35분. 손으로 그립니다. 노트북은 닫아 둡니다.</a:t>
             </a:r>
             <a:endParaRPr lang="en-US" sz="1150" dirty="0"/>
           </a:p>
@@ -14097,7 +14086,7 @@
                 <a:ea typeface="Pretendard" pitchFamily="34" charset="-122"/>
                 <a:cs typeface="Pretendard" pitchFamily="34" charset="-120"/>
               </a:rPr>
-              <a:t>글은 쓰지 않습니다. 설명 영역 네 칸은 반드시 표시합니다. 세 안을 서로 다르게 그립니다.</a:t>
+              <a:t>글은 쓰지 않습니다. 설명 영역 네 칸은 우선적으로 표시합니다. 세 안을 서로 다르게 그립니다.</a:t>
             </a:r>
             <a:endParaRPr lang="en-US" sz="1150" dirty="0"/>
           </a:p>
@@ -14270,7 +14259,7 @@
                 <a:ea typeface="Pretendard" pitchFamily="34" charset="-122"/>
                 <a:cs typeface="Pretendard" pitchFamily="34" charset="-120"/>
               </a:rPr>
-              <a:t>세 안을 다 못 그려도 두 안까지는 그립니다. 하나만 그리면 고를 수가 없습니다.</a:t>
+              <a:t>세 안을 모두 그리기 어렵다면 두 안까지는 작성합니다. 한 안만으로는 비교가 되지 않습니다.</a:t>
             </a:r>
             <a:endParaRPr lang="en-US" sz="1300" dirty="0"/>
           </a:p>
@@ -14625,7 +14614,7 @@
                 <a:ea typeface="Pretendard SemiBold" pitchFamily="34" charset="-122"/>
                 <a:cs typeface="Pretendard SemiBold" pitchFamily="34" charset="-120"/>
               </a:rPr>
-              <a:t>오늘 확인하고 가는 것</a:t>
+              <a:t>최종 점검 항목</a:t>
             </a:r>
             <a:endParaRPr lang="en-US" sz="3000" dirty="0"/>
           </a:p>
@@ -17744,24 +17733,27 @@
         </p:nvSpPr>
         <p:spPr>
           <a:xfrm>
-            <a:off x="640080" y="2889504"/>
-            <a:ext cx="7863840" cy="786384"/>
-          </a:xfrm>
-          <a:prstGeom prst="rect">
-            <a:avLst/>
-          </a:prstGeom>
-          <a:noFill/>
-          <a:ln/>
-        </p:spPr>
-        <p:txBody>
-          <a:bodyPr wrap="square" lIns="0" tIns="0" rIns="0" bIns="0" rtlCol="0" anchor="ctr"/>
-          <a:lstStyle/>
-          <a:p>
-            <a:pPr indent="0" marL="0">
-              <a:buNone/>
-            </a:pPr>
-            <a:r>
-              <a:rPr lang="en-US" sz="4600" dirty="0">
+            <a:off x="640080" y="2761488"/>
+            <a:ext cx="7863840" cy="1042416"/>
+          </a:xfrm>
+          <a:prstGeom prst="rect">
+            <a:avLst/>
+          </a:prstGeom>
+          <a:noFill/>
+          <a:ln/>
+        </p:spPr>
+        <p:txBody>
+          <a:bodyPr wrap="square" lIns="0" tIns="0" rIns="0" bIns="0" rtlCol="0" anchor="ctr"/>
+          <a:lstStyle/>
+          <a:p>
+            <a:pPr indent="0" marL="0">
+              <a:lnSpc>
+                <a:spcPct val="114000"/>
+              </a:lnSpc>
+              <a:buNone/>
+            </a:pPr>
+            <a:r>
+              <a:rPr lang="en-US" sz="3400" dirty="0">
                 <a:solidFill>
                   <a:srgbClr val="FFFFFF"/>
                 </a:solidFill>
@@ -17769,9 +17761,9 @@
                 <a:ea typeface="Pretendard SemiBold" pitchFamily="34" charset="-122"/>
                 <a:cs typeface="Pretendard SemiBold" pitchFamily="34" charset="-120"/>
               </a:rPr>
-              <a:t>패널은 누가 보나</a:t>
-            </a:r>
-            <a:endParaRPr lang="en-US" sz="4600" dirty="0"/>
+              <a:t>패널을 보는 사람과 필요한 정보</a:t>
+            </a:r>
+            <a:endParaRPr lang="en-US" sz="3400" dirty="0"/>
           </a:p>
         </p:txBody>
       </p:sp>
@@ -17836,7 +17828,7 @@
                 <a:ea typeface="Pretendard Light" pitchFamily="34" charset="-122"/>
                 <a:cs typeface="Pretendard Light" pitchFamily="34" charset="-120"/>
               </a:rPr>
-              <a:t>세 사람이 같은 패널을 봅니다. 보는 것이 각각 다릅니다.</a:t>
+              <a:t>같은 패널을 보는 사람이 셋이고, 각자 중요하게 보는 정보가 다릅니다.</a:t>
             </a:r>
             <a:endParaRPr lang="en-US" sz="1350" dirty="0"/>
           </a:p>
@@ -18127,7 +18119,7 @@
                 <a:ea typeface="Pretendard SemiBold" pitchFamily="34" charset="-122"/>
                 <a:cs typeface="Pretendard SemiBold" pitchFamily="34" charset="-120"/>
               </a:rPr>
-              <a:t>세 사람이 같은 패널을 봅니다</a:t>
+              <a:t>관람자에 따라 중요하게 보는 정보가 다릅니다</a:t>
             </a:r>
             <a:endParaRPr lang="en-US" sz="3000" dirty="0"/>
           </a:p>
@@ -18166,7 +18158,7 @@
                 <a:ea typeface="Pretendard" pitchFamily="34" charset="-122"/>
                 <a:cs typeface="Pretendard" pitchFamily="34" charset="-120"/>
               </a:rPr>
-              <a:t>셋 다 3초 안에 무엇인지 알아야 합니다.</a:t>
+              <a:t>세 사람 모두 3초 안에 무엇인지 파악할 수 있어야 합니다.</a:t>
             </a:r>
             <a:endParaRPr lang="en-US" sz="1150" dirty="0"/>
           </a:p>
@@ -19274,7 +19266,7 @@
                 <a:ea typeface="Pretendard SemiBold" pitchFamily="34" charset="-122"/>
                 <a:cs typeface="Pretendard SemiBold" pitchFamily="34" charset="-120"/>
               </a:rPr>
-              <a:t>2m에서 보이는 패널</a:t>
+              <a:t>멀리서도 핵심이 보이는 패널 구성</a:t>
             </a:r>
             <a:endParaRPr lang="en-US" sz="3000" dirty="0"/>
           </a:p>
@@ -19313,7 +19305,7 @@
                 <a:ea typeface="Pretendard" pitchFamily="34" charset="-122"/>
                 <a:cs typeface="Pretendard" pitchFamily="34" charset="-120"/>
               </a:rPr>
-              <a:t>같은 내용인데 크기와 위계로 갈립니다.</a:t>
+              <a:t>같은 내용이라도 크기와 위계에 따라 전달되는 정도가 달라집니다.</a:t>
             </a:r>
             <a:endParaRPr lang="en-US" sz="1150" dirty="0"/>
           </a:p>
@@ -19377,7 +19369,7 @@
                 <a:ea typeface="Pretendard SemiBold" pitchFamily="34" charset="-122"/>
                 <a:cs typeface="Pretendard SemiBold" pitchFamily="34" charset="-120"/>
               </a:rPr>
-              <a:t>2m에서 안 보임</a:t>
+              <a:t>핵심이 드러나지 않음</a:t>
             </a:r>
             <a:endParaRPr lang="en-US" sz="1700" dirty="0"/>
           </a:p>
@@ -19466,7 +19458,7 @@
                 <a:ea typeface="Pretendard SemiBold" pitchFamily="34" charset="-122"/>
                 <a:cs typeface="Pretendard SemiBold" pitchFamily="34" charset="-120"/>
               </a:rPr>
-              <a:t>2m에서 보임</a:t>
+              <a:t>핵심이 드러남</a:t>
             </a:r>
             <a:endParaRPr lang="en-US" sz="1700" dirty="0"/>
           </a:p>
@@ -20331,7 +20323,7 @@
                 <a:ea typeface="Pretendard" pitchFamily="34" charset="-122"/>
                 <a:cs typeface="Pretendard" pitchFamily="34" charset="-120"/>
               </a:rPr>
-              <a:t>멀리서 안 보이면 가까이 오지 않습니다. 3초가 전부입니다.</a:t>
+              <a:t>멀리서 핵심이 인지되어야 관람자가 자세한 내용을 확인하게 됩니다.</a:t>
             </a:r>
             <a:endParaRPr lang="en-US" sz="1300" dirty="0"/>
           </a:p>
@@ -20769,24 +20761,27 @@
         </p:nvSpPr>
         <p:spPr>
           <a:xfrm>
-            <a:off x="640080" y="2889504"/>
-            <a:ext cx="7863840" cy="786384"/>
-          </a:xfrm>
-          <a:prstGeom prst="rect">
-            <a:avLst/>
-          </a:prstGeom>
-          <a:noFill/>
-          <a:ln/>
-        </p:spPr>
-        <p:txBody>
-          <a:bodyPr wrap="square" lIns="0" tIns="0" rIns="0" bIns="0" rtlCol="0" anchor="ctr"/>
-          <a:lstStyle/>
-          <a:p>
-            <a:pPr indent="0" marL="0">
-              <a:buNone/>
-            </a:pPr>
-            <a:r>
-              <a:rPr lang="en-US" sz="4600" dirty="0">
+            <a:off x="640080" y="2761488"/>
+            <a:ext cx="7863840" cy="1042416"/>
+          </a:xfrm>
+          <a:prstGeom prst="rect">
+            <a:avLst/>
+          </a:prstGeom>
+          <a:noFill/>
+          <a:ln/>
+        </p:spPr>
+        <p:txBody>
+          <a:bodyPr wrap="square" lIns="0" tIns="0" rIns="0" bIns="0" rtlCol="0" anchor="ctr"/>
+          <a:lstStyle/>
+          <a:p>
+            <a:pPr indent="0" marL="0">
+              <a:lnSpc>
+                <a:spcPct val="114000"/>
+              </a:lnSpc>
+              <a:buNone/>
+            </a:pPr>
+            <a:r>
+              <a:rPr lang="en-US" sz="3400" dirty="0">
                 <a:solidFill>
                   <a:srgbClr val="FFFFFF"/>
                 </a:solidFill>
@@ -20794,9 +20789,9 @@
                 <a:ea typeface="Pretendard SemiBold" pitchFamily="34" charset="-122"/>
                 <a:cs typeface="Pretendard SemiBold" pitchFamily="34" charset="-120"/>
               </a:rPr>
-              <a:t>그리드 세우기</a:t>
-            </a:r>
-            <a:endParaRPr lang="en-US" sz="4600" dirty="0"/>
+              <a:t>패널 구성의 기준이 되는 그리드</a:t>
+            </a:r>
+            <a:endParaRPr lang="en-US" sz="3400" dirty="0"/>
           </a:p>
         </p:txBody>
       </p:sp>
@@ -20861,7 +20856,7 @@
                 <a:ea typeface="Pretendard Light" pitchFamily="34" charset="-122"/>
                 <a:cs typeface="Pretendard Light" pitchFamily="34" charset="-120"/>
               </a:rPr>
-              <a:t>내용을 올리기 전에 끝냅니다. 순서를 바꾸면 처음부터 다시 합니다.</a:t>
+              <a:t>내용을 배치하기 전에 먼저 정합니다. 초기 구조를 정해 두면 이후 수정 비용이 줄어듭니다.</a:t>
             </a:r>
             <a:endParaRPr lang="en-US" sz="1350" dirty="0"/>
           </a:p>
@@ -21152,7 +21147,7 @@
                 <a:ea typeface="Pretendard SemiBold" pitchFamily="34" charset="-122"/>
                 <a:cs typeface="Pretendard SemiBold" pitchFamily="34" charset="-120"/>
               </a:rPr>
-              <a:t>그리드와 글자 크기</a:t>
+              <a:t>패널 구성에 필요한 기본 규격</a:t>
             </a:r>
             <a:endParaRPr lang="en-US" sz="3000" dirty="0"/>
           </a:p>
@@ -21634,7 +21629,7 @@
                 <a:ea typeface="Pretendard SemiBold" pitchFamily="34" charset="-122"/>
                 <a:cs typeface="Pretendard SemiBold" pitchFamily="34" charset="-120"/>
               </a:rPr>
-              <a:t>올리는 순서</a:t>
+              <a:t>레이아웃 작업의 진행 순서</a:t>
             </a:r>
             <a:endParaRPr lang="en-US" sz="3000" dirty="0"/>
           </a:p>
@@ -21673,7 +21668,7 @@
                 <a:ea typeface="Pretendard" pitchFamily="34" charset="-122"/>
                 <a:cs typeface="Pretendard" pitchFamily="34" charset="-120"/>
               </a:rPr>
-              <a:t>네모만 앉힌 상태에서 한 번 멈추고 봅니다.</a:t>
+              <a:t>네모만 배치한 상태에서 한 번 확인하는 것이 좋습니다.</a:t>
             </a:r>
             <a:endParaRPr lang="en-US" sz="1150" dirty="0"/>
           </a:p>
@@ -22164,7 +22159,7 @@
                 <a:ea typeface="Pretendard" pitchFamily="34" charset="-122"/>
                 <a:cs typeface="Pretendard" pitchFamily="34" charset="-120"/>
               </a:rPr>
-              <a:t>순서를 바꾸면 처음부터 다시 합니다. 그리드 없이 올린 것은 고칠 수가 없습니다.</a:t>
+              <a:t>초기 구조를 먼저 정하면 이후 수정 비용을 크게 줄일 수 있습니다.</a:t>
             </a:r>
             <a:endParaRPr lang="en-US" sz="1300" dirty="0"/>
           </a:p>
@@ -22519,7 +22514,7 @@
                 <a:ea typeface="Pretendard SemiBold" pitchFamily="34" charset="-122"/>
                 <a:cs typeface="Pretendard SemiBold" pitchFamily="34" charset="-120"/>
               </a:rPr>
-              <a:t>그리드 없이와 그리드 위에</a:t>
+              <a:t>그리드 적용 전후 비교</a:t>
             </a:r>
             <a:endParaRPr lang="en-US" sz="3000" dirty="0"/>
           </a:p>
@@ -22558,7 +22553,7 @@
                 <a:ea typeface="Pretendard" pitchFamily="34" charset="-122"/>
                 <a:cs typeface="Pretendard" pitchFamily="34" charset="-120"/>
               </a:rPr>
-              <a:t>그리드는 보이지 않습니다. 그런데 안 맞으면 바로 보입니다.</a:t>
+              <a:t>그리드 자체는 드러나지 않지만, 맞지 않으면 바로 눈에 띕니다.</a:t>
             </a:r>
             <a:endParaRPr lang="en-US" sz="1150" dirty="0"/>
           </a:p>
@@ -23576,7 +23571,7 @@
                 <a:ea typeface="Pretendard" pitchFamily="34" charset="-122"/>
                 <a:cs typeface="Pretendard" pitchFamily="34" charset="-120"/>
               </a:rPr>
-              <a:t>셋째 줄이 마감 때 제일 아픕니다. 지금 세워 두면 그때 고칠 수 있습니다.</a:t>
+              <a:t>세 번째 항목이 마감에서 가장 부담이 됩니다. 지금 기준을 세워 두면 그때 수정할 수 있습니다.</a:t>
             </a:r>
             <a:endParaRPr lang="en-US" sz="1300" dirty="0"/>
           </a:p>
